--- a/projektarbeit/presentation/august_basyxmeeting.pptx
+++ b/projektarbeit/presentation/august_basyxmeeting.pptx
@@ -121,6 +121,11 @@
       </a:defRPr>
     </a:lvl9pPr>
   </p:defaultTextStyle>
+  <p:extLst>
+    <p:ext uri="{EFAFB233-063F-42B5-8137-9DF3F51BA10A}">
+      <p15:sldGuideLst xmlns:p15="http://schemas.microsoft.com/office/powerpoint/2012/main"/>
+    </p:ext>
+  </p:extLst>
 </p:presentation>
 </file>
 
@@ -273,7 +278,7 @@
           <a:p>
             <a:fld id="{0DE80A91-7431-4091-9641-458FCB3FE87A}" type="datetimeFigureOut">
               <a:rPr lang="de-DE" smtClean="0"/>
-              <a:t>31.08.2022</a:t>
+              <a:t>02.09.2022</a:t>
             </a:fld>
             <a:endParaRPr lang="de-DE"/>
           </a:p>
@@ -473,7 +478,7 @@
           <a:p>
             <a:fld id="{0DE80A91-7431-4091-9641-458FCB3FE87A}" type="datetimeFigureOut">
               <a:rPr lang="de-DE" smtClean="0"/>
-              <a:t>31.08.2022</a:t>
+              <a:t>02.09.2022</a:t>
             </a:fld>
             <a:endParaRPr lang="de-DE"/>
           </a:p>
@@ -683,7 +688,7 @@
           <a:p>
             <a:fld id="{0DE80A91-7431-4091-9641-458FCB3FE87A}" type="datetimeFigureOut">
               <a:rPr lang="de-DE" smtClean="0"/>
-              <a:t>31.08.2022</a:t>
+              <a:t>02.09.2022</a:t>
             </a:fld>
             <a:endParaRPr lang="de-DE"/>
           </a:p>
@@ -883,7 +888,7 @@
           <a:p>
             <a:fld id="{0DE80A91-7431-4091-9641-458FCB3FE87A}" type="datetimeFigureOut">
               <a:rPr lang="de-DE" smtClean="0"/>
-              <a:t>31.08.2022</a:t>
+              <a:t>02.09.2022</a:t>
             </a:fld>
             <a:endParaRPr lang="de-DE"/>
           </a:p>
@@ -1159,7 +1164,7 @@
           <a:p>
             <a:fld id="{0DE80A91-7431-4091-9641-458FCB3FE87A}" type="datetimeFigureOut">
               <a:rPr lang="de-DE" smtClean="0"/>
-              <a:t>31.08.2022</a:t>
+              <a:t>02.09.2022</a:t>
             </a:fld>
             <a:endParaRPr lang="de-DE"/>
           </a:p>
@@ -1427,7 +1432,7 @@
           <a:p>
             <a:fld id="{0DE80A91-7431-4091-9641-458FCB3FE87A}" type="datetimeFigureOut">
               <a:rPr lang="de-DE" smtClean="0"/>
-              <a:t>31.08.2022</a:t>
+              <a:t>02.09.2022</a:t>
             </a:fld>
             <a:endParaRPr lang="de-DE"/>
           </a:p>
@@ -1842,7 +1847,7 @@
           <a:p>
             <a:fld id="{0DE80A91-7431-4091-9641-458FCB3FE87A}" type="datetimeFigureOut">
               <a:rPr lang="de-DE" smtClean="0"/>
-              <a:t>31.08.2022</a:t>
+              <a:t>02.09.2022</a:t>
             </a:fld>
             <a:endParaRPr lang="de-DE"/>
           </a:p>
@@ -1984,7 +1989,7 @@
           <a:p>
             <a:fld id="{0DE80A91-7431-4091-9641-458FCB3FE87A}" type="datetimeFigureOut">
               <a:rPr lang="de-DE" smtClean="0"/>
-              <a:t>31.08.2022</a:t>
+              <a:t>02.09.2022</a:t>
             </a:fld>
             <a:endParaRPr lang="de-DE"/>
           </a:p>
@@ -2097,7 +2102,7 @@
           <a:p>
             <a:fld id="{0DE80A91-7431-4091-9641-458FCB3FE87A}" type="datetimeFigureOut">
               <a:rPr lang="de-DE" smtClean="0"/>
-              <a:t>31.08.2022</a:t>
+              <a:t>02.09.2022</a:t>
             </a:fld>
             <a:endParaRPr lang="de-DE"/>
           </a:p>
@@ -2410,7 +2415,7 @@
           <a:p>
             <a:fld id="{0DE80A91-7431-4091-9641-458FCB3FE87A}" type="datetimeFigureOut">
               <a:rPr lang="de-DE" smtClean="0"/>
-              <a:t>31.08.2022</a:t>
+              <a:t>02.09.2022</a:t>
             </a:fld>
             <a:endParaRPr lang="de-DE"/>
           </a:p>
@@ -2699,7 +2704,7 @@
           <a:p>
             <a:fld id="{0DE80A91-7431-4091-9641-458FCB3FE87A}" type="datetimeFigureOut">
               <a:rPr lang="de-DE" smtClean="0"/>
-              <a:t>31.08.2022</a:t>
+              <a:t>02.09.2022</a:t>
             </a:fld>
             <a:endParaRPr lang="de-DE"/>
           </a:p>
@@ -2942,7 +2947,7 @@
           <a:p>
             <a:fld id="{0DE80A91-7431-4091-9641-458FCB3FE87A}" type="datetimeFigureOut">
               <a:rPr lang="de-DE" smtClean="0"/>
-              <a:t>31.08.2022</a:t>
+              <a:t>02.09.2022</a:t>
             </a:fld>
             <a:endParaRPr lang="de-DE"/>
           </a:p>
@@ -4860,7 +4865,7 @@
             </a:r>
             <a:r>
               <a:rPr lang="de-DE" b="1" dirty="0"/>
-              <a:t>(Abbild-modus)</a:t>
+              <a:t>(Abbild-Modus)</a:t>
             </a:r>
           </a:p>
           <a:p>
@@ -6036,7 +6041,7 @@
 </file>
 
 <file path=ppt/slides/slide16.xml><?xml version="1.0" encoding="utf-8"?>
-<p:sld xmlns:a="http://schemas.openxmlformats.org/drawingml/2006/main" xmlns:r="http://schemas.openxmlformats.org/officeDocument/2006/relationships" xmlns:p="http://schemas.openxmlformats.org/presentationml/2006/main">
+<p:sld xmlns:a="http://schemas.openxmlformats.org/drawingml/2006/main" xmlns:r="http://schemas.openxmlformats.org/officeDocument/2006/relationships" xmlns:p="http://schemas.openxmlformats.org/presentationml/2006/main" show="0">
   <p:cSld>
     <p:spTree>
       <p:nvGrpSpPr>
@@ -6586,7 +6591,7 @@
             </a:pPr>
             <a:r>
               <a:rPr lang="de-DE" dirty="0"/>
-              <a:t>Motivation</a:t>
+              <a:t>Problemstellung</a:t>
             </a:r>
           </a:p>
           <a:p>
@@ -6875,15 +6880,7 @@
           <a:p>
             <a:r>
               <a:rPr lang="de-DE" dirty="0"/>
-              <a:t>Keine vereinfachtere </a:t>
-            </a:r>
-            <a:r>
-              <a:rPr lang="de-DE" dirty="0" err="1"/>
-              <a:t>Kommunikationsschnittstele</a:t>
-            </a:r>
-            <a:r>
-              <a:rPr lang="de-DE" dirty="0"/>
-              <a:t> zwischen </a:t>
+              <a:t>Keine vereinfachte Kommunikationsschnittstelle zwischen </a:t>
             </a:r>
             <a:r>
               <a:rPr lang="de-DE" dirty="0" err="1"/>
@@ -6932,7 +6929,7 @@
             <a:pPr lvl="1"/>
             <a:r>
               <a:rPr lang="de-DE" dirty="0"/>
-              <a:t>vereinfachte und schnellere Anbindung eines zu testen Hardware und Software an ein MATLAB/Simulink-Modell</a:t>
+              <a:t>vereinfachte und schnellere Anbindung eines zu testen Hardware und Software in ein MATLAB/Simulink-Modell</a:t>
             </a:r>
           </a:p>
           <a:p>
@@ -6993,7 +6990,7 @@
           <a:p>
             <a:r>
               <a:rPr lang="de-DE" sz="2400" dirty="0"/>
-              <a:t>Motivation</a:t>
+              <a:t>Problemstellung</a:t>
             </a:r>
           </a:p>
         </p:txBody>
@@ -7437,7 +7434,7 @@
           <a:p>
             <a:r>
               <a:rPr lang="de-DE" dirty="0"/>
-              <a:t>Einsetzung der Bibliothek in einem Anwendungsbeispiel</a:t>
+              <a:t>Anwendungsbeispiel</a:t>
             </a:r>
           </a:p>
         </p:txBody>
@@ -8756,6 +8753,58 @@
           </a:p>
         </p:txBody>
       </p:sp>
+      <p:sp>
+        <p:nvSpPr>
+          <p:cNvPr id="3" name="Rectangle 2">
+            <a:extLst>
+              <a:ext uri="{FF2B5EF4-FFF2-40B4-BE49-F238E27FC236}">
+                <a16:creationId xmlns:a16="http://schemas.microsoft.com/office/drawing/2014/main" id="{2460AA63-A827-4655-AC74-E091702B8461}"/>
+              </a:ext>
+            </a:extLst>
+          </p:cNvPr>
+          <p:cNvSpPr/>
+          <p:nvPr/>
+        </p:nvSpPr>
+        <p:spPr>
+          <a:xfrm>
+            <a:off x="7188868" y="244810"/>
+            <a:ext cx="2947737" cy="5458158"/>
+          </a:xfrm>
+          <a:prstGeom prst="rect">
+            <a:avLst/>
+          </a:prstGeom>
+          <a:solidFill>
+            <a:schemeClr val="bg1"/>
+          </a:solidFill>
+          <a:ln>
+            <a:noFill/>
+          </a:ln>
+        </p:spPr>
+        <p:style>
+          <a:lnRef idx="2">
+            <a:schemeClr val="accent1">
+              <a:shade val="50000"/>
+            </a:schemeClr>
+          </a:lnRef>
+          <a:fillRef idx="1">
+            <a:schemeClr val="accent1"/>
+          </a:fillRef>
+          <a:effectRef idx="0">
+            <a:schemeClr val="accent1"/>
+          </a:effectRef>
+          <a:fontRef idx="minor">
+            <a:schemeClr val="lt1"/>
+          </a:fontRef>
+        </p:style>
+        <p:txBody>
+          <a:bodyPr rtlCol="0" anchor="ctr"/>
+          <a:lstStyle/>
+          <a:p>
+            <a:pPr algn="ctr"/>
+            <a:endParaRPr lang="de-DE"/>
+          </a:p>
+        </p:txBody>
+      </p:sp>
     </p:spTree>
     <p:extLst>
       <p:ext uri="{BB962C8B-B14F-4D97-AF65-F5344CB8AC3E}">
